--- a/Scripts_R100_Materiales/Folios_Transaccion/Docs/Lot Track 13032021.pptx
+++ b/Scripts_R100_Materiales/Folios_Transaccion/Docs/Lot Track 13032021.pptx
@@ -5,11 +5,15 @@
     <p:sldMasterId id="2147483648" r:id="rId1"/>
   </p:sldMasterIdLst>
   <p:notesMasterIdLst>
-    <p:notesMasterId r:id="rId4"/>
+    <p:notesMasterId r:id="rId8"/>
   </p:notesMasterIdLst>
   <p:sldIdLst>
-    <p:sldId id="398" r:id="rId2"/>
-    <p:sldId id="399" r:id="rId3"/>
+    <p:sldId id="400" r:id="rId2"/>
+    <p:sldId id="398" r:id="rId3"/>
+    <p:sldId id="403" r:id="rId4"/>
+    <p:sldId id="402" r:id="rId5"/>
+    <p:sldId id="401" r:id="rId6"/>
+    <p:sldId id="399" r:id="rId7"/>
   </p:sldIdLst>
   <p:sldSz cx="9144000" cy="6858000" type="screen4x3"/>
   <p:notesSz cx="6858000" cy="9144000"/>
@@ -209,7 +213,7 @@
           <a:p>
             <a:fld id="{A17B1792-3256-4E77-8442-3E205CD69EF5}" type="datetimeFigureOut">
               <a:rPr lang="en-US" smtClean="0"/>
-              <a:t>3/13/2021</a:t>
+              <a:t>10/25/2021</a:t>
             </a:fld>
             <a:endParaRPr lang="en-US"/>
           </a:p>
@@ -655,7 +659,7 @@
           <a:p>
             <a:fld id="{07558649-2619-44F9-8F30-2D6466E57529}" type="datetimeFigureOut">
               <a:rPr lang="en-US" smtClean="0"/>
-              <a:t>3/13/2021</a:t>
+              <a:t>10/25/2021</a:t>
             </a:fld>
             <a:endParaRPr lang="en-US"/>
           </a:p>
@@ -823,7 +827,7 @@
           <a:p>
             <a:fld id="{07558649-2619-44F9-8F30-2D6466E57529}" type="datetimeFigureOut">
               <a:rPr lang="en-US" smtClean="0"/>
-              <a:t>3/13/2021</a:t>
+              <a:t>10/25/2021</a:t>
             </a:fld>
             <a:endParaRPr lang="en-US"/>
           </a:p>
@@ -1001,7 +1005,7 @@
           <a:p>
             <a:fld id="{07558649-2619-44F9-8F30-2D6466E57529}" type="datetimeFigureOut">
               <a:rPr lang="en-US" smtClean="0"/>
-              <a:t>3/13/2021</a:t>
+              <a:t>10/25/2021</a:t>
             </a:fld>
             <a:endParaRPr lang="en-US"/>
           </a:p>
@@ -1169,7 +1173,7 @@
           <a:p>
             <a:fld id="{07558649-2619-44F9-8F30-2D6466E57529}" type="datetimeFigureOut">
               <a:rPr lang="en-US" smtClean="0"/>
-              <a:t>3/13/2021</a:t>
+              <a:t>10/25/2021</a:t>
             </a:fld>
             <a:endParaRPr lang="en-US"/>
           </a:p>
@@ -1414,7 +1418,7 @@
           <a:p>
             <a:fld id="{07558649-2619-44F9-8F30-2D6466E57529}" type="datetimeFigureOut">
               <a:rPr lang="en-US" smtClean="0"/>
-              <a:t>3/13/2021</a:t>
+              <a:t>10/25/2021</a:t>
             </a:fld>
             <a:endParaRPr lang="en-US"/>
           </a:p>
@@ -1699,7 +1703,7 @@
           <a:p>
             <a:fld id="{07558649-2619-44F9-8F30-2D6466E57529}" type="datetimeFigureOut">
               <a:rPr lang="en-US" smtClean="0"/>
-              <a:t>3/13/2021</a:t>
+              <a:t>10/25/2021</a:t>
             </a:fld>
             <a:endParaRPr lang="en-US"/>
           </a:p>
@@ -2118,7 +2122,7 @@
           <a:p>
             <a:fld id="{07558649-2619-44F9-8F30-2D6466E57529}" type="datetimeFigureOut">
               <a:rPr lang="en-US" smtClean="0"/>
-              <a:t>3/13/2021</a:t>
+              <a:t>10/25/2021</a:t>
             </a:fld>
             <a:endParaRPr lang="en-US"/>
           </a:p>
@@ -2235,7 +2239,7 @@
           <a:p>
             <a:fld id="{07558649-2619-44F9-8F30-2D6466E57529}" type="datetimeFigureOut">
               <a:rPr lang="en-US" smtClean="0"/>
-              <a:t>3/13/2021</a:t>
+              <a:t>10/25/2021</a:t>
             </a:fld>
             <a:endParaRPr lang="en-US"/>
           </a:p>
@@ -2330,7 +2334,7 @@
           <a:p>
             <a:fld id="{07558649-2619-44F9-8F30-2D6466E57529}" type="datetimeFigureOut">
               <a:rPr lang="en-US" smtClean="0"/>
-              <a:t>3/13/2021</a:t>
+              <a:t>10/25/2021</a:t>
             </a:fld>
             <a:endParaRPr lang="en-US"/>
           </a:p>
@@ -2605,7 +2609,7 @@
           <a:p>
             <a:fld id="{07558649-2619-44F9-8F30-2D6466E57529}" type="datetimeFigureOut">
               <a:rPr lang="en-US" smtClean="0"/>
-              <a:t>3/13/2021</a:t>
+              <a:t>10/25/2021</a:t>
             </a:fld>
             <a:endParaRPr lang="en-US"/>
           </a:p>
@@ -2857,7 +2861,7 @@
           <a:p>
             <a:fld id="{07558649-2619-44F9-8F30-2D6466E57529}" type="datetimeFigureOut">
               <a:rPr lang="en-US" smtClean="0"/>
-              <a:t>3/13/2021</a:t>
+              <a:t>10/25/2021</a:t>
             </a:fld>
             <a:endParaRPr lang="en-US"/>
           </a:p>
@@ -3077,7 +3081,7 @@
           <a:p>
             <a:fld id="{07558649-2619-44F9-8F30-2D6466E57529}" type="datetimeFigureOut">
               <a:rPr lang="en-US" smtClean="0"/>
-              <a:t>3/13/2021</a:t>
+              <a:t>10/25/2021</a:t>
             </a:fld>
             <a:endParaRPr lang="en-US"/>
           </a:p>
@@ -3454,6 +3458,816 @@
       </p:grpSpPr>
       <p:sp>
         <p:nvSpPr>
+          <p:cNvPr id="5" name="Title 1"/>
+          <p:cNvSpPr txBox="1">
+            <a:spLocks/>
+          </p:cNvSpPr>
+          <p:nvPr/>
+        </p:nvSpPr>
+        <p:spPr>
+          <a:xfrm>
+            <a:off x="1187624" y="2564904"/>
+            <a:ext cx="7772400" cy="1470025"/>
+          </a:xfrm>
+          <a:prstGeom prst="rect">
+            <a:avLst/>
+          </a:prstGeom>
+        </p:spPr>
+        <p:txBody>
+          <a:bodyPr vert="horz" lIns="91440" tIns="45720" rIns="91440" bIns="45720" rtlCol="0" anchor="ctr">
+            <a:normAutofit/>
+          </a:bodyPr>
+          <a:lstStyle>
+            <a:lvl1pPr algn="ctr" defTabSz="914400" rtl="0" eaLnBrk="1" latinLnBrk="0" hangingPunct="1">
+              <a:spcBef>
+                <a:spcPct val="0"/>
+              </a:spcBef>
+              <a:buNone/>
+              <a:defRPr sz="4400" kern="1200">
+                <a:solidFill>
+                  <a:schemeClr val="tx1"/>
+                </a:solidFill>
+                <a:latin typeface="+mj-lt"/>
+                <a:ea typeface="+mj-ea"/>
+                <a:cs typeface="+mj-cs"/>
+              </a:defRPr>
+            </a:lvl1pPr>
+          </a:lstStyle>
+          <a:p>
+            <a:r>
+              <a:rPr lang="es-MX" b="1" dirty="0">
+                <a:latin typeface="Century Gothic" panose="020B0502020202020204" pitchFamily="34" charset="0"/>
+              </a:rPr>
+              <a:t>18/10/2021 – 22/10/2021</a:t>
+            </a:r>
+            <a:endParaRPr lang="es-MX" dirty="0">
+              <a:latin typeface="Century Gothic" panose="020B0502020202020204" pitchFamily="34" charset="0"/>
+            </a:endParaRPr>
+          </a:p>
+        </p:txBody>
+      </p:sp>
+    </p:spTree>
+    <p:extLst>
+      <p:ext uri="{BB962C8B-B14F-4D97-AF65-F5344CB8AC3E}">
+        <p14:creationId xmlns:p14="http://schemas.microsoft.com/office/powerpoint/2010/main" val="985878630"/>
+      </p:ext>
+    </p:extLst>
+  </p:cSld>
+  <p:clrMapOvr>
+    <a:masterClrMapping/>
+  </p:clrMapOvr>
+</p:sld>
+</file>
+
+<file path=ppt/slides/slide2.xml><?xml version="1.0" encoding="utf-8"?>
+<p:sld xmlns:a="http://schemas.openxmlformats.org/drawingml/2006/main" xmlns:r="http://schemas.openxmlformats.org/officeDocument/2006/relationships" xmlns:p="http://schemas.openxmlformats.org/presentationml/2006/main">
+  <p:cSld>
+    <p:spTree>
+      <p:nvGrpSpPr>
+        <p:cNvPr id="1" name=""/>
+        <p:cNvGrpSpPr/>
+        <p:nvPr/>
+      </p:nvGrpSpPr>
+      <p:grpSpPr>
+        <a:xfrm>
+          <a:off x="0" y="0"/>
+          <a:ext cx="0" cy="0"/>
+          <a:chOff x="0" y="0"/>
+          <a:chExt cx="0" cy="0"/>
+        </a:xfrm>
+      </p:grpSpPr>
+      <p:sp>
+        <p:nvSpPr>
+          <p:cNvPr id="8" name="Title 1"/>
+          <p:cNvSpPr txBox="1">
+            <a:spLocks/>
+          </p:cNvSpPr>
+          <p:nvPr/>
+        </p:nvSpPr>
+        <p:spPr>
+          <a:xfrm>
+            <a:off x="1087408" y="274638"/>
+            <a:ext cx="7229008" cy="634082"/>
+          </a:xfrm>
+          <a:prstGeom prst="rect">
+            <a:avLst/>
+          </a:prstGeom>
+        </p:spPr>
+        <p:txBody>
+          <a:bodyPr/>
+          <a:lstStyle>
+            <a:lvl1pPr algn="ctr" defTabSz="914400" rtl="0" eaLnBrk="1" latinLnBrk="0" hangingPunct="1">
+              <a:spcBef>
+                <a:spcPct val="0"/>
+              </a:spcBef>
+              <a:buNone/>
+              <a:defRPr sz="4400" kern="1200">
+                <a:solidFill>
+                  <a:schemeClr val="tx1"/>
+                </a:solidFill>
+                <a:latin typeface="+mj-lt"/>
+                <a:ea typeface="+mj-ea"/>
+                <a:cs typeface="+mj-cs"/>
+              </a:defRPr>
+            </a:lvl1pPr>
+          </a:lstStyle>
+          <a:p>
+            <a:pPr algn="l"/>
+            <a:r>
+              <a:rPr lang="es-ES" sz="2000" dirty="0">
+                <a:solidFill>
+                  <a:srgbClr val="3F1900"/>
+                </a:solidFill>
+              </a:rPr>
+              <a:t>Lot Track: Seguimiento de Lotes por Color.</a:t>
+            </a:r>
+            <a:endParaRPr lang="en-US" sz="2000" dirty="0">
+              <a:solidFill>
+                <a:srgbClr val="3F1900"/>
+              </a:solidFill>
+            </a:endParaRPr>
+          </a:p>
+        </p:txBody>
+      </p:sp>
+      <p:sp>
+        <p:nvSpPr>
+          <p:cNvPr id="4" name="Content Placeholder 3"/>
+          <p:cNvSpPr txBox="1">
+            <a:spLocks/>
+          </p:cNvSpPr>
+          <p:nvPr/>
+        </p:nvSpPr>
+        <p:spPr>
+          <a:xfrm>
+            <a:off x="1331640" y="1196753"/>
+            <a:ext cx="7488832" cy="5137780"/>
+          </a:xfrm>
+          <a:prstGeom prst="rect">
+            <a:avLst/>
+          </a:prstGeom>
+        </p:spPr>
+        <p:txBody>
+          <a:bodyPr>
+            <a:normAutofit/>
+          </a:bodyPr>
+          <a:lstStyle>
+            <a:lvl1pPr marL="342900" indent="-342900" algn="l" defTabSz="914400" rtl="0" eaLnBrk="1" latinLnBrk="0" hangingPunct="1">
+              <a:spcBef>
+                <a:spcPct val="20000"/>
+              </a:spcBef>
+              <a:buFont typeface="Arial" panose="020B0604020202020204" pitchFamily="34" charset="0"/>
+              <a:buChar char="•"/>
+              <a:defRPr sz="3200" kern="1200">
+                <a:solidFill>
+                  <a:schemeClr val="tx1"/>
+                </a:solidFill>
+                <a:latin typeface="+mn-lt"/>
+                <a:ea typeface="+mn-ea"/>
+                <a:cs typeface="+mn-cs"/>
+              </a:defRPr>
+            </a:lvl1pPr>
+            <a:lvl2pPr marL="742950" indent="-285750" algn="l" defTabSz="914400" rtl="0" eaLnBrk="1" latinLnBrk="0" hangingPunct="1">
+              <a:spcBef>
+                <a:spcPct val="20000"/>
+              </a:spcBef>
+              <a:buFont typeface="Arial" panose="020B0604020202020204" pitchFamily="34" charset="0"/>
+              <a:buChar char="–"/>
+              <a:defRPr sz="2800" kern="1200">
+                <a:solidFill>
+                  <a:schemeClr val="tx1"/>
+                </a:solidFill>
+                <a:latin typeface="+mn-lt"/>
+                <a:ea typeface="+mn-ea"/>
+                <a:cs typeface="+mn-cs"/>
+              </a:defRPr>
+            </a:lvl2pPr>
+            <a:lvl3pPr marL="1143000" indent="-228600" algn="l" defTabSz="914400" rtl="0" eaLnBrk="1" latinLnBrk="0" hangingPunct="1">
+              <a:spcBef>
+                <a:spcPct val="20000"/>
+              </a:spcBef>
+              <a:buFont typeface="Arial" panose="020B0604020202020204" pitchFamily="34" charset="0"/>
+              <a:buChar char="•"/>
+              <a:defRPr sz="2400" kern="1200">
+                <a:solidFill>
+                  <a:schemeClr val="tx1"/>
+                </a:solidFill>
+                <a:latin typeface="+mn-lt"/>
+                <a:ea typeface="+mn-ea"/>
+                <a:cs typeface="+mn-cs"/>
+              </a:defRPr>
+            </a:lvl3pPr>
+            <a:lvl4pPr marL="1600200" indent="-228600" algn="l" defTabSz="914400" rtl="0" eaLnBrk="1" latinLnBrk="0" hangingPunct="1">
+              <a:spcBef>
+                <a:spcPct val="20000"/>
+              </a:spcBef>
+              <a:buFont typeface="Arial" panose="020B0604020202020204" pitchFamily="34" charset="0"/>
+              <a:buChar char="–"/>
+              <a:defRPr sz="2000" kern="1200">
+                <a:solidFill>
+                  <a:schemeClr val="tx1"/>
+                </a:solidFill>
+                <a:latin typeface="+mn-lt"/>
+                <a:ea typeface="+mn-ea"/>
+                <a:cs typeface="+mn-cs"/>
+              </a:defRPr>
+            </a:lvl4pPr>
+            <a:lvl5pPr marL="2057400" indent="-228600" algn="l" defTabSz="914400" rtl="0" eaLnBrk="1" latinLnBrk="0" hangingPunct="1">
+              <a:spcBef>
+                <a:spcPct val="20000"/>
+              </a:spcBef>
+              <a:buFont typeface="Arial" panose="020B0604020202020204" pitchFamily="34" charset="0"/>
+              <a:buChar char="»"/>
+              <a:defRPr sz="2000" kern="1200">
+                <a:solidFill>
+                  <a:schemeClr val="tx1"/>
+                </a:solidFill>
+                <a:latin typeface="+mn-lt"/>
+                <a:ea typeface="+mn-ea"/>
+                <a:cs typeface="+mn-cs"/>
+              </a:defRPr>
+            </a:lvl5pPr>
+            <a:lvl6pPr marL="2514600" indent="-228600" algn="l" defTabSz="914400" rtl="0" eaLnBrk="1" latinLnBrk="0" hangingPunct="1">
+              <a:spcBef>
+                <a:spcPct val="20000"/>
+              </a:spcBef>
+              <a:buFont typeface="Arial" panose="020B0604020202020204" pitchFamily="34" charset="0"/>
+              <a:buChar char="•"/>
+              <a:defRPr sz="2000" kern="1200">
+                <a:solidFill>
+                  <a:schemeClr val="tx1"/>
+                </a:solidFill>
+                <a:latin typeface="+mn-lt"/>
+                <a:ea typeface="+mn-ea"/>
+                <a:cs typeface="+mn-cs"/>
+              </a:defRPr>
+            </a:lvl6pPr>
+            <a:lvl7pPr marL="2971800" indent="-228600" algn="l" defTabSz="914400" rtl="0" eaLnBrk="1" latinLnBrk="0" hangingPunct="1">
+              <a:spcBef>
+                <a:spcPct val="20000"/>
+              </a:spcBef>
+              <a:buFont typeface="Arial" panose="020B0604020202020204" pitchFamily="34" charset="0"/>
+              <a:buChar char="•"/>
+              <a:defRPr sz="2000" kern="1200">
+                <a:solidFill>
+                  <a:schemeClr val="tx1"/>
+                </a:solidFill>
+                <a:latin typeface="+mn-lt"/>
+                <a:ea typeface="+mn-ea"/>
+                <a:cs typeface="+mn-cs"/>
+              </a:defRPr>
+            </a:lvl7pPr>
+            <a:lvl8pPr marL="3429000" indent="-228600" algn="l" defTabSz="914400" rtl="0" eaLnBrk="1" latinLnBrk="0" hangingPunct="1">
+              <a:spcBef>
+                <a:spcPct val="20000"/>
+              </a:spcBef>
+              <a:buFont typeface="Arial" panose="020B0604020202020204" pitchFamily="34" charset="0"/>
+              <a:buChar char="•"/>
+              <a:defRPr sz="2000" kern="1200">
+                <a:solidFill>
+                  <a:schemeClr val="tx1"/>
+                </a:solidFill>
+                <a:latin typeface="+mn-lt"/>
+                <a:ea typeface="+mn-ea"/>
+                <a:cs typeface="+mn-cs"/>
+              </a:defRPr>
+            </a:lvl8pPr>
+            <a:lvl9pPr marL="3886200" indent="-228600" algn="l" defTabSz="914400" rtl="0" eaLnBrk="1" latinLnBrk="0" hangingPunct="1">
+              <a:spcBef>
+                <a:spcPct val="20000"/>
+              </a:spcBef>
+              <a:buFont typeface="Arial" panose="020B0604020202020204" pitchFamily="34" charset="0"/>
+              <a:buChar char="•"/>
+              <a:defRPr sz="2000" kern="1200">
+                <a:solidFill>
+                  <a:schemeClr val="tx1"/>
+                </a:solidFill>
+                <a:latin typeface="+mn-lt"/>
+                <a:ea typeface="+mn-ea"/>
+                <a:cs typeface="+mn-cs"/>
+              </a:defRPr>
+            </a:lvl9pPr>
+          </a:lstStyle>
+          <a:p>
+            <a:pPr marL="0" indent="0" algn="just">
+              <a:buFont typeface="Arial" panose="020B0604020202020204" pitchFamily="34" charset="0"/>
+              <a:buNone/>
+            </a:pPr>
+            <a:endParaRPr lang="en-US" sz="2000" i="1"/>
+          </a:p>
+        </p:txBody>
+      </p:sp>
+      <p:sp>
+        <p:nvSpPr>
+          <p:cNvPr id="10" name="Rectangle 9"/>
+          <p:cNvSpPr/>
+          <p:nvPr/>
+        </p:nvSpPr>
+        <p:spPr>
+          <a:xfrm>
+            <a:off x="1115615" y="1054477"/>
+            <a:ext cx="7920879" cy="461665"/>
+          </a:xfrm>
+          <a:prstGeom prst="rect">
+            <a:avLst/>
+          </a:prstGeom>
+        </p:spPr>
+        <p:txBody>
+          <a:bodyPr wrap="square">
+            <a:spAutoFit/>
+          </a:bodyPr>
+          <a:lstStyle/>
+          <a:p>
+            <a:pPr>
+              <a:buFont typeface="Arial" panose="020B0604020202020204" pitchFamily="34" charset="0"/>
+              <a:buChar char="•"/>
+            </a:pPr>
+            <a:r>
+              <a:rPr lang="es-ES" sz="1200" b="0" i="0" dirty="0">
+                <a:solidFill>
+                  <a:srgbClr val="222222"/>
+                </a:solidFill>
+                <a:effectLst/>
+                <a:latin typeface="Segoe UI" panose="020B0502040204020203" pitchFamily="34" charset="0"/>
+              </a:rPr>
+              <a:t> Se mo</a:t>
+            </a:r>
+            <a:r>
+              <a:rPr lang="es-ES" sz="1200" dirty="0">
+                <a:solidFill>
+                  <a:srgbClr val="222222"/>
+                </a:solidFill>
+                <a:latin typeface="Segoe UI" panose="020B0502040204020203" pitchFamily="34" charset="0"/>
+              </a:rPr>
+              <a:t>difico la Pantalla </a:t>
+            </a:r>
+            <a:r>
+              <a:rPr lang="es-ES" sz="1200" b="1" dirty="0">
+                <a:solidFill>
+                  <a:srgbClr val="222222"/>
+                </a:solidFill>
+                <a:latin typeface="Segoe UI" panose="020B0502040204020203" pitchFamily="34" charset="0"/>
+              </a:rPr>
+              <a:t>Lot Track</a:t>
+            </a:r>
+            <a:r>
+              <a:rPr lang="es-ES" sz="1200" dirty="0">
+                <a:solidFill>
+                  <a:srgbClr val="222222"/>
+                </a:solidFill>
+                <a:latin typeface="Segoe UI" panose="020B0502040204020203" pitchFamily="34" charset="0"/>
+              </a:rPr>
+              <a:t> para poder realizar la búsqueda por </a:t>
+            </a:r>
+            <a:r>
+              <a:rPr lang="es-ES" sz="1200" b="1" dirty="0">
+                <a:solidFill>
+                  <a:srgbClr val="222222"/>
+                </a:solidFill>
+                <a:latin typeface="Segoe UI" panose="020B0502040204020203" pitchFamily="34" charset="0"/>
+              </a:rPr>
+              <a:t>Color de Piel y Año</a:t>
+            </a:r>
+            <a:r>
+              <a:rPr lang="es-ES" sz="1200" dirty="0">
+                <a:solidFill>
+                  <a:srgbClr val="222222"/>
+                </a:solidFill>
+                <a:latin typeface="Segoe UI" panose="020B0502040204020203" pitchFamily="34" charset="0"/>
+              </a:rPr>
+              <a:t>, el resultado de la búsqueda nos arrojara el detallado de los lotes que se importaron para ese color en el año especificado.</a:t>
+            </a:r>
+            <a:endParaRPr lang="es-ES" sz="1200" b="0" i="0" dirty="0">
+              <a:solidFill>
+                <a:srgbClr val="222222"/>
+              </a:solidFill>
+              <a:effectLst/>
+              <a:latin typeface="Segoe UI" panose="020B0502040204020203" pitchFamily="34" charset="0"/>
+            </a:endParaRPr>
+          </a:p>
+        </p:txBody>
+      </p:sp>
+      <p:pic>
+        <p:nvPicPr>
+          <p:cNvPr id="5" name="Imagen 4">
+            <a:extLst>
+              <a:ext uri="{FF2B5EF4-FFF2-40B4-BE49-F238E27FC236}">
+                <a16:creationId xmlns:a16="http://schemas.microsoft.com/office/drawing/2014/main" id="{9A9FACE4-5435-4004-B7EE-67CD49169F1F}"/>
+              </a:ext>
+            </a:extLst>
+          </p:cNvPr>
+          <p:cNvPicPr>
+            <a:picLocks noChangeAspect="1"/>
+          </p:cNvPicPr>
+          <p:nvPr/>
+        </p:nvPicPr>
+        <p:blipFill>
+          <a:blip r:embed="rId2"/>
+          <a:stretch>
+            <a:fillRect/>
+          </a:stretch>
+        </p:blipFill>
+        <p:spPr>
+          <a:xfrm>
+            <a:off x="3199606" y="1700808"/>
+            <a:ext cx="3676650" cy="1440160"/>
+          </a:xfrm>
+          <a:prstGeom prst="rect">
+            <a:avLst/>
+          </a:prstGeom>
+        </p:spPr>
+      </p:pic>
+    </p:spTree>
+    <p:extLst>
+      <p:ext uri="{BB962C8B-B14F-4D97-AF65-F5344CB8AC3E}">
+        <p14:creationId xmlns:p14="http://schemas.microsoft.com/office/powerpoint/2010/main" val="2693263523"/>
+      </p:ext>
+    </p:extLst>
+  </p:cSld>
+  <p:clrMapOvr>
+    <a:masterClrMapping/>
+  </p:clrMapOvr>
+</p:sld>
+</file>
+
+<file path=ppt/slides/slide3.xml><?xml version="1.0" encoding="utf-8"?>
+<p:sld xmlns:a="http://schemas.openxmlformats.org/drawingml/2006/main" xmlns:r="http://schemas.openxmlformats.org/officeDocument/2006/relationships" xmlns:p="http://schemas.openxmlformats.org/presentationml/2006/main">
+  <p:cSld>
+    <p:spTree>
+      <p:nvGrpSpPr>
+        <p:cNvPr id="1" name=""/>
+        <p:cNvGrpSpPr/>
+        <p:nvPr/>
+      </p:nvGrpSpPr>
+      <p:grpSpPr>
+        <a:xfrm>
+          <a:off x="0" y="0"/>
+          <a:ext cx="0" cy="0"/>
+          <a:chOff x="0" y="0"/>
+          <a:chExt cx="0" cy="0"/>
+        </a:xfrm>
+      </p:grpSpPr>
+      <p:sp>
+        <p:nvSpPr>
+          <p:cNvPr id="8" name="Title 1"/>
+          <p:cNvSpPr txBox="1">
+            <a:spLocks/>
+          </p:cNvSpPr>
+          <p:nvPr/>
+        </p:nvSpPr>
+        <p:spPr>
+          <a:xfrm>
+            <a:off x="1087408" y="274638"/>
+            <a:ext cx="7229008" cy="634082"/>
+          </a:xfrm>
+          <a:prstGeom prst="rect">
+            <a:avLst/>
+          </a:prstGeom>
+        </p:spPr>
+        <p:txBody>
+          <a:bodyPr/>
+          <a:lstStyle>
+            <a:lvl1pPr algn="ctr" defTabSz="914400" rtl="0" eaLnBrk="1" latinLnBrk="0" hangingPunct="1">
+              <a:spcBef>
+                <a:spcPct val="0"/>
+              </a:spcBef>
+              <a:buNone/>
+              <a:defRPr sz="4400" kern="1200">
+                <a:solidFill>
+                  <a:schemeClr val="tx1"/>
+                </a:solidFill>
+                <a:latin typeface="+mj-lt"/>
+                <a:ea typeface="+mj-ea"/>
+                <a:cs typeface="+mj-cs"/>
+              </a:defRPr>
+            </a:lvl1pPr>
+          </a:lstStyle>
+          <a:p>
+            <a:pPr algn="l"/>
+            <a:r>
+              <a:rPr lang="es-ES" sz="2000" dirty="0">
+                <a:solidFill>
+                  <a:srgbClr val="3F1900"/>
+                </a:solidFill>
+              </a:rPr>
+              <a:t>Lot Track: Seguimiento de Lotes por Color.</a:t>
+            </a:r>
+            <a:endParaRPr lang="en-US" sz="2000" dirty="0">
+              <a:solidFill>
+                <a:srgbClr val="3F1900"/>
+              </a:solidFill>
+            </a:endParaRPr>
+          </a:p>
+        </p:txBody>
+      </p:sp>
+      <p:sp>
+        <p:nvSpPr>
+          <p:cNvPr id="4" name="Content Placeholder 3"/>
+          <p:cNvSpPr txBox="1">
+            <a:spLocks/>
+          </p:cNvSpPr>
+          <p:nvPr/>
+        </p:nvSpPr>
+        <p:spPr>
+          <a:xfrm>
+            <a:off x="1331640" y="1196753"/>
+            <a:ext cx="7488832" cy="5137780"/>
+          </a:xfrm>
+          <a:prstGeom prst="rect">
+            <a:avLst/>
+          </a:prstGeom>
+        </p:spPr>
+        <p:txBody>
+          <a:bodyPr>
+            <a:normAutofit/>
+          </a:bodyPr>
+          <a:lstStyle>
+            <a:lvl1pPr marL="342900" indent="-342900" algn="l" defTabSz="914400" rtl="0" eaLnBrk="1" latinLnBrk="0" hangingPunct="1">
+              <a:spcBef>
+                <a:spcPct val="20000"/>
+              </a:spcBef>
+              <a:buFont typeface="Arial" panose="020B0604020202020204" pitchFamily="34" charset="0"/>
+              <a:buChar char="•"/>
+              <a:defRPr sz="3200" kern="1200">
+                <a:solidFill>
+                  <a:schemeClr val="tx1"/>
+                </a:solidFill>
+                <a:latin typeface="+mn-lt"/>
+                <a:ea typeface="+mn-ea"/>
+                <a:cs typeface="+mn-cs"/>
+              </a:defRPr>
+            </a:lvl1pPr>
+            <a:lvl2pPr marL="742950" indent="-285750" algn="l" defTabSz="914400" rtl="0" eaLnBrk="1" latinLnBrk="0" hangingPunct="1">
+              <a:spcBef>
+                <a:spcPct val="20000"/>
+              </a:spcBef>
+              <a:buFont typeface="Arial" panose="020B0604020202020204" pitchFamily="34" charset="0"/>
+              <a:buChar char="–"/>
+              <a:defRPr sz="2800" kern="1200">
+                <a:solidFill>
+                  <a:schemeClr val="tx1"/>
+                </a:solidFill>
+                <a:latin typeface="+mn-lt"/>
+                <a:ea typeface="+mn-ea"/>
+                <a:cs typeface="+mn-cs"/>
+              </a:defRPr>
+            </a:lvl2pPr>
+            <a:lvl3pPr marL="1143000" indent="-228600" algn="l" defTabSz="914400" rtl="0" eaLnBrk="1" latinLnBrk="0" hangingPunct="1">
+              <a:spcBef>
+                <a:spcPct val="20000"/>
+              </a:spcBef>
+              <a:buFont typeface="Arial" panose="020B0604020202020204" pitchFamily="34" charset="0"/>
+              <a:buChar char="•"/>
+              <a:defRPr sz="2400" kern="1200">
+                <a:solidFill>
+                  <a:schemeClr val="tx1"/>
+                </a:solidFill>
+                <a:latin typeface="+mn-lt"/>
+                <a:ea typeface="+mn-ea"/>
+                <a:cs typeface="+mn-cs"/>
+              </a:defRPr>
+            </a:lvl3pPr>
+            <a:lvl4pPr marL="1600200" indent="-228600" algn="l" defTabSz="914400" rtl="0" eaLnBrk="1" latinLnBrk="0" hangingPunct="1">
+              <a:spcBef>
+                <a:spcPct val="20000"/>
+              </a:spcBef>
+              <a:buFont typeface="Arial" panose="020B0604020202020204" pitchFamily="34" charset="0"/>
+              <a:buChar char="–"/>
+              <a:defRPr sz="2000" kern="1200">
+                <a:solidFill>
+                  <a:schemeClr val="tx1"/>
+                </a:solidFill>
+                <a:latin typeface="+mn-lt"/>
+                <a:ea typeface="+mn-ea"/>
+                <a:cs typeface="+mn-cs"/>
+              </a:defRPr>
+            </a:lvl4pPr>
+            <a:lvl5pPr marL="2057400" indent="-228600" algn="l" defTabSz="914400" rtl="0" eaLnBrk="1" latinLnBrk="0" hangingPunct="1">
+              <a:spcBef>
+                <a:spcPct val="20000"/>
+              </a:spcBef>
+              <a:buFont typeface="Arial" panose="020B0604020202020204" pitchFamily="34" charset="0"/>
+              <a:buChar char="»"/>
+              <a:defRPr sz="2000" kern="1200">
+                <a:solidFill>
+                  <a:schemeClr val="tx1"/>
+                </a:solidFill>
+                <a:latin typeface="+mn-lt"/>
+                <a:ea typeface="+mn-ea"/>
+                <a:cs typeface="+mn-cs"/>
+              </a:defRPr>
+            </a:lvl5pPr>
+            <a:lvl6pPr marL="2514600" indent="-228600" algn="l" defTabSz="914400" rtl="0" eaLnBrk="1" latinLnBrk="0" hangingPunct="1">
+              <a:spcBef>
+                <a:spcPct val="20000"/>
+              </a:spcBef>
+              <a:buFont typeface="Arial" panose="020B0604020202020204" pitchFamily="34" charset="0"/>
+              <a:buChar char="•"/>
+              <a:defRPr sz="2000" kern="1200">
+                <a:solidFill>
+                  <a:schemeClr val="tx1"/>
+                </a:solidFill>
+                <a:latin typeface="+mn-lt"/>
+                <a:ea typeface="+mn-ea"/>
+                <a:cs typeface="+mn-cs"/>
+              </a:defRPr>
+            </a:lvl6pPr>
+            <a:lvl7pPr marL="2971800" indent="-228600" algn="l" defTabSz="914400" rtl="0" eaLnBrk="1" latinLnBrk="0" hangingPunct="1">
+              <a:spcBef>
+                <a:spcPct val="20000"/>
+              </a:spcBef>
+              <a:buFont typeface="Arial" panose="020B0604020202020204" pitchFamily="34" charset="0"/>
+              <a:buChar char="•"/>
+              <a:defRPr sz="2000" kern="1200">
+                <a:solidFill>
+                  <a:schemeClr val="tx1"/>
+                </a:solidFill>
+                <a:latin typeface="+mn-lt"/>
+                <a:ea typeface="+mn-ea"/>
+                <a:cs typeface="+mn-cs"/>
+              </a:defRPr>
+            </a:lvl7pPr>
+            <a:lvl8pPr marL="3429000" indent="-228600" algn="l" defTabSz="914400" rtl="0" eaLnBrk="1" latinLnBrk="0" hangingPunct="1">
+              <a:spcBef>
+                <a:spcPct val="20000"/>
+              </a:spcBef>
+              <a:buFont typeface="Arial" panose="020B0604020202020204" pitchFamily="34" charset="0"/>
+              <a:buChar char="•"/>
+              <a:defRPr sz="2000" kern="1200">
+                <a:solidFill>
+                  <a:schemeClr val="tx1"/>
+                </a:solidFill>
+                <a:latin typeface="+mn-lt"/>
+                <a:ea typeface="+mn-ea"/>
+                <a:cs typeface="+mn-cs"/>
+              </a:defRPr>
+            </a:lvl8pPr>
+            <a:lvl9pPr marL="3886200" indent="-228600" algn="l" defTabSz="914400" rtl="0" eaLnBrk="1" latinLnBrk="0" hangingPunct="1">
+              <a:spcBef>
+                <a:spcPct val="20000"/>
+              </a:spcBef>
+              <a:buFont typeface="Arial" panose="020B0604020202020204" pitchFamily="34" charset="0"/>
+              <a:buChar char="•"/>
+              <a:defRPr sz="2000" kern="1200">
+                <a:solidFill>
+                  <a:schemeClr val="tx1"/>
+                </a:solidFill>
+                <a:latin typeface="+mn-lt"/>
+                <a:ea typeface="+mn-ea"/>
+                <a:cs typeface="+mn-cs"/>
+              </a:defRPr>
+            </a:lvl9pPr>
+          </a:lstStyle>
+          <a:p>
+            <a:pPr marL="0" indent="0" algn="just">
+              <a:buFont typeface="Arial" panose="020B0604020202020204" pitchFamily="34" charset="0"/>
+              <a:buNone/>
+            </a:pPr>
+            <a:endParaRPr lang="en-US" sz="2000" i="1"/>
+          </a:p>
+        </p:txBody>
+      </p:sp>
+      <p:pic>
+        <p:nvPicPr>
+          <p:cNvPr id="7" name="Imagen 6">
+            <a:extLst>
+              <a:ext uri="{FF2B5EF4-FFF2-40B4-BE49-F238E27FC236}">
+                <a16:creationId xmlns:a16="http://schemas.microsoft.com/office/drawing/2014/main" id="{3BEE2985-B313-425D-82F0-3012D10CCC43}"/>
+              </a:ext>
+            </a:extLst>
+          </p:cNvPr>
+          <p:cNvPicPr>
+            <a:picLocks noChangeAspect="1"/>
+          </p:cNvPicPr>
+          <p:nvPr/>
+        </p:nvPicPr>
+        <p:blipFill>
+          <a:blip r:embed="rId2"/>
+          <a:stretch>
+            <a:fillRect/>
+          </a:stretch>
+        </p:blipFill>
+        <p:spPr>
+          <a:xfrm>
+            <a:off x="1223121" y="980728"/>
+            <a:ext cx="7813374" cy="5760640"/>
+          </a:xfrm>
+          <a:prstGeom prst="rect">
+            <a:avLst/>
+          </a:prstGeom>
+        </p:spPr>
+      </p:pic>
+    </p:spTree>
+    <p:extLst>
+      <p:ext uri="{BB962C8B-B14F-4D97-AF65-F5344CB8AC3E}">
+        <p14:creationId xmlns:p14="http://schemas.microsoft.com/office/powerpoint/2010/main" val="117472732"/>
+      </p:ext>
+    </p:extLst>
+  </p:cSld>
+  <p:clrMapOvr>
+    <a:masterClrMapping/>
+  </p:clrMapOvr>
+</p:sld>
+</file>
+
+<file path=ppt/slides/slide4.xml><?xml version="1.0" encoding="utf-8"?>
+<p:sld xmlns:a="http://schemas.openxmlformats.org/drawingml/2006/main" xmlns:r="http://schemas.openxmlformats.org/officeDocument/2006/relationships" xmlns:p="http://schemas.openxmlformats.org/presentationml/2006/main">
+  <p:cSld>
+    <p:spTree>
+      <p:nvGrpSpPr>
+        <p:cNvPr id="1" name=""/>
+        <p:cNvGrpSpPr/>
+        <p:nvPr/>
+      </p:nvGrpSpPr>
+      <p:grpSpPr>
+        <a:xfrm>
+          <a:off x="0" y="0"/>
+          <a:ext cx="0" cy="0"/>
+          <a:chOff x="0" y="0"/>
+          <a:chExt cx="0" cy="0"/>
+        </a:xfrm>
+      </p:grpSpPr>
+      <p:sp>
+        <p:nvSpPr>
+          <p:cNvPr id="5" name="Title 1"/>
+          <p:cNvSpPr txBox="1">
+            <a:spLocks/>
+          </p:cNvSpPr>
+          <p:nvPr/>
+        </p:nvSpPr>
+        <p:spPr>
+          <a:xfrm>
+            <a:off x="1187624" y="2564904"/>
+            <a:ext cx="7772400" cy="1470025"/>
+          </a:xfrm>
+          <a:prstGeom prst="rect">
+            <a:avLst/>
+          </a:prstGeom>
+        </p:spPr>
+        <p:txBody>
+          <a:bodyPr vert="horz" lIns="91440" tIns="45720" rIns="91440" bIns="45720" rtlCol="0" anchor="ctr">
+            <a:normAutofit/>
+          </a:bodyPr>
+          <a:lstStyle>
+            <a:lvl1pPr algn="ctr" defTabSz="914400" rtl="0" eaLnBrk="1" latinLnBrk="0" hangingPunct="1">
+              <a:spcBef>
+                <a:spcPct val="0"/>
+              </a:spcBef>
+              <a:buNone/>
+              <a:defRPr sz="4400" kern="1200">
+                <a:solidFill>
+                  <a:schemeClr val="tx1"/>
+                </a:solidFill>
+                <a:latin typeface="+mj-lt"/>
+                <a:ea typeface="+mj-ea"/>
+                <a:cs typeface="+mj-cs"/>
+              </a:defRPr>
+            </a:lvl1pPr>
+          </a:lstStyle>
+          <a:p>
+            <a:r>
+              <a:rPr lang="es-MX" b="1">
+                <a:latin typeface="Century Gothic" panose="020B0502020202020204" pitchFamily="34" charset="0"/>
+              </a:rPr>
+              <a:t>08/03/2021 – 12/03/2021</a:t>
+            </a:r>
+            <a:endParaRPr lang="es-MX" dirty="0">
+              <a:latin typeface="Century Gothic" panose="020B0502020202020204" pitchFamily="34" charset="0"/>
+            </a:endParaRPr>
+          </a:p>
+        </p:txBody>
+      </p:sp>
+    </p:spTree>
+    <p:extLst>
+      <p:ext uri="{BB962C8B-B14F-4D97-AF65-F5344CB8AC3E}">
+        <p14:creationId xmlns:p14="http://schemas.microsoft.com/office/powerpoint/2010/main" val="4285314047"/>
+      </p:ext>
+    </p:extLst>
+  </p:cSld>
+  <p:clrMapOvr>
+    <a:masterClrMapping/>
+  </p:clrMapOvr>
+</p:sld>
+</file>
+
+<file path=ppt/slides/slide5.xml><?xml version="1.0" encoding="utf-8"?>
+<p:sld xmlns:a="http://schemas.openxmlformats.org/drawingml/2006/main" xmlns:r="http://schemas.openxmlformats.org/officeDocument/2006/relationships" xmlns:p="http://schemas.openxmlformats.org/presentationml/2006/main">
+  <p:cSld>
+    <p:spTree>
+      <p:nvGrpSpPr>
+        <p:cNvPr id="1" name=""/>
+        <p:cNvGrpSpPr/>
+        <p:nvPr/>
+      </p:nvGrpSpPr>
+      <p:grpSpPr>
+        <a:xfrm>
+          <a:off x="0" y="0"/>
+          <a:ext cx="0" cy="0"/>
+          <a:chOff x="0" y="0"/>
+          <a:chExt cx="0" cy="0"/>
+        </a:xfrm>
+      </p:grpSpPr>
+      <p:sp>
+        <p:nvSpPr>
           <p:cNvPr id="8" name="Title 1"/>
           <p:cNvSpPr txBox="1">
             <a:spLocks/>
@@ -3783,7 +4597,7 @@
     </p:spTree>
     <p:extLst>
       <p:ext uri="{BB962C8B-B14F-4D97-AF65-F5344CB8AC3E}">
-        <p14:creationId xmlns:p14="http://schemas.microsoft.com/office/powerpoint/2010/main" val="2693263523"/>
+        <p14:creationId xmlns:p14="http://schemas.microsoft.com/office/powerpoint/2010/main" val="2150659964"/>
       </p:ext>
     </p:extLst>
   </p:cSld>
@@ -3793,7 +4607,7 @@
 </p:sld>
 </file>
 
-<file path=ppt/slides/slide2.xml><?xml version="1.0" encoding="utf-8"?>
+<file path=ppt/slides/slide6.xml><?xml version="1.0" encoding="utf-8"?>
 <p:sld xmlns:a="http://schemas.openxmlformats.org/drawingml/2006/main" xmlns:r="http://schemas.openxmlformats.org/officeDocument/2006/relationships" xmlns:p="http://schemas.openxmlformats.org/presentationml/2006/main">
   <p:cSld>
     <p:spTree>
